--- a/classes/parte-6-analisis-de-malware/159-fileless-malware-y-living-off-the-land/clase-159-presentacion.pptx
+++ b/classes/parte-6-analisis-de-malware/159-fileless-malware-y-living-off-the-land/clase-159-presentacion.pptx
@@ -17,6 +17,9 @@
     <p:sldId id="265" r:id="rId16"/>
     <p:sldId id="266" r:id="rId17"/>
     <p:sldId id="267" r:id="rId18"/>
+    <p:sldId id="268" r:id="rId19"/>
+    <p:sldId id="269" r:id="rId20"/>
+    <p:sldId id="270" r:id="rId21"/>
   </p:sldIdLst>
   <p:sldSz cx="9144000" cy="6858000" type="screen4x3"/>
   <p:notesSz cx="6858000" cy="9144000"/>
@@ -3198,7 +3201,7 @@
                   <a:srgbClr val="0B3D2E"/>
                 </a:solidFill>
               </a:rPr>
-              <a:t>⚠️ Errores comunes</a:t>
+              <a:t>✍️ Ejercicios</a:t>
             </a:r>
           </a:p>
         </p:txBody>
@@ -3236,67 +3239,82 @@
                   <a:srgbClr val="22282E"/>
                 </a:solidFill>
               </a:rPr>
-              <a:t>•  "No hay malware" en disco — Es fileless; analiza memoria y registro</a:t>
-            </a:r>
-          </a:p>
-          <a:p>
-            <a:pPr>
-              <a:spcAft>
-                <a:spcPts val="600"/>
-              </a:spcAft>
-            </a:pPr>
-            <a:r>
-              <a:rPr sz="1500">
-                <a:solidFill>
-                  <a:srgbClr val="22282E"/>
-                </a:solidFill>
-              </a:rPr>
-              <a:t>•  Sin telemetría útil — Sysmon/logging no configurados; habilítalos antes de detonar</a:t>
-            </a:r>
-          </a:p>
-          <a:p>
-            <a:pPr>
-              <a:spcAft>
-                <a:spcPts val="600"/>
-              </a:spcAft>
-            </a:pPr>
-            <a:r>
-              <a:rPr sz="1500">
-                <a:solidFill>
-                  <a:srgbClr val="22282E"/>
-                </a:solidFill>
-              </a:rPr>
-              <a:t>•  LOLBin parece legítimo — Revisa argumentos y proceso padre, no solo el binario</a:t>
-            </a:r>
-          </a:p>
-          <a:p>
-            <a:pPr>
-              <a:spcAft>
-                <a:spcPts val="600"/>
-              </a:spcAft>
-            </a:pPr>
-            <a:r>
-              <a:rPr sz="1500">
-                <a:solidFill>
-                  <a:srgbClr val="22282E"/>
-                </a:solidFill>
-              </a:rPr>
-              <a:t>•  Persistencia no aparece — Busca WMI y registro, no solo tareas/servicios con archivo</a:t>
-            </a:r>
-          </a:p>
-          <a:p>
-            <a:pPr>
-              <a:spcAft>
-                <a:spcPts val="600"/>
-              </a:spcAft>
-            </a:pPr>
-            <a:r>
-              <a:rPr sz="1500">
-                <a:solidFill>
-                  <a:srgbClr val="22282E"/>
-                </a:solidFill>
-              </a:rPr>
-              <a:t>•  Payload perdido al reiniciar — Fileless no persiste el binario; captura RAM en caliente</a:t>
+              <a:t>•  Explica por qué el AV de archivos falla contra fileless.</a:t>
+            </a:r>
+          </a:p>
+          <a:p>
+            <a:pPr>
+              <a:spcAft>
+                <a:spcPts val="600"/>
+              </a:spcAft>
+            </a:pPr>
+            <a:r>
+              <a:rPr sz="1500">
+                <a:solidFill>
+                  <a:srgbClr val="22282E"/>
+                </a:solidFill>
+              </a:rPr>
+              <a:t>•  Enumera 6 LOLBins y su abuso típico (con Event Sysmon esperado).</a:t>
+            </a:r>
+          </a:p>
+          <a:p>
+            <a:pPr>
+              <a:spcAft>
+                <a:spcPts val="600"/>
+              </a:spcAft>
+            </a:pPr>
+            <a:r>
+              <a:rPr sz="1500">
+                <a:solidFill>
+                  <a:srgbClr val="22282E"/>
+                </a:solidFill>
+              </a:rPr>
+              <a:t>•  Detecta un payload en memoria con malfind y vuélcalo.</a:t>
+            </a:r>
+          </a:p>
+          <a:p>
+            <a:pPr>
+              <a:spcAft>
+                <a:spcPts val="600"/>
+              </a:spcAft>
+            </a:pPr>
+            <a:r>
+              <a:rPr sz="1500">
+                <a:solidFill>
+                  <a:srgbClr val="22282E"/>
+                </a:solidFill>
+              </a:rPr>
+              <a:t>•  Identifica una persistencia WMI y descríbela.</a:t>
+            </a:r>
+          </a:p>
+          <a:p>
+            <a:pPr>
+              <a:spcAft>
+                <a:spcPts val="600"/>
+              </a:spcAft>
+            </a:pPr>
+            <a:r>
+              <a:rPr sz="1500">
+                <a:solidFill>
+                  <a:srgbClr val="22282E"/>
+                </a:solidFill>
+              </a:rPr>
+              <a:t>•  Escribe una regla de detección para regsvr32 con URL remota.</a:t>
+            </a:r>
+          </a:p>
+          <a:p>
+            <a:pPr>
+              <a:spcAft>
+                <a:spcPts val="600"/>
+              </a:spcAft>
+            </a:pPr>
+            <a:r>
+              <a:rPr sz="1500">
+                <a:solidFill>
+                  <a:srgbClr val="22282E"/>
+                </a:solidFill>
+              </a:rPr>
+              <a:t>•  Reconstruye una cadena LOLBin desde logs de Sysmon.</a:t>
             </a:r>
           </a:p>
         </p:txBody>
@@ -3347,7 +3365,7 @@
                   <a:srgbClr val="0B3D2E"/>
                 </a:solidFill>
               </a:rPr>
-              <a:t>❓ Preguntas frecuentes</a:t>
+              <a:t>📝 Reto verificable</a:t>
             </a:r>
           </a:p>
         </p:txBody>
@@ -3385,37 +3403,22 @@
                   <a:srgbClr val="22282E"/>
                 </a:solidFill>
               </a:rPr>
-              <a:t>•  ❓ ¿Fileless significa sin ningún rastro? No. Deja rastro en memoria, registro, WMI y telemetría; solo evita el archivo ejecutable clásico en disco.</a:t>
-            </a:r>
-          </a:p>
-          <a:p>
-            <a:pPr>
-              <a:spcAft>
-                <a:spcPts val="600"/>
-              </a:spcAft>
-            </a:pPr>
-            <a:r>
-              <a:rPr sz="1500">
-                <a:solidFill>
-                  <a:srgbClr val="22282E"/>
-                </a:solidFill>
-              </a:rPr>
-              <a:t>•  ❓ ¿Cómo detecto abuso de LOLBins? Por comportamiento: relaciones proceso-padre inusuales, argumentos anómalos y accesos de red desde binarios que normalmente no los hacen.</a:t>
-            </a:r>
-          </a:p>
-          <a:p>
-            <a:pPr>
-              <a:spcAft>
-                <a:spcPts val="600"/>
-              </a:spcAft>
-            </a:pPr>
-            <a:r>
-              <a:rPr sz="1500">
-                <a:solidFill>
-                  <a:srgbClr val="22282E"/>
-                </a:solidFill>
-              </a:rPr>
-              <a:t>•  ❓ ¿La memoria es imprescindible aquí? Sí. Para fileless, el volcado de RAM suele ser la única fuente que contiene el payload real.</a:t>
+              <a:t>•  Analiza una cadena fileless/LOLBin y entrega su reconstrucción con: payload en memoria volcado, persistencia sin archivo identificada, LOLBins abusados y detecciones por comportamiento mapeadas a…</a:t>
+            </a:r>
+          </a:p>
+          <a:p>
+            <a:pPr>
+              <a:spcAft>
+                <a:spcPts val="600"/>
+              </a:spcAft>
+            </a:pPr>
+            <a:r>
+              <a:rPr sz="1500">
+                <a:solidFill>
+                  <a:srgbClr val="22282E"/>
+                </a:solidFill>
+              </a:rPr>
+              <a:t>•  Criterio de aceptación: presentas evidencia de memoria (malfind/registro/WMI) y de telemetría (Sysmon/4104) que juntas explican la cadena completa, más al menos dos detecciones por comportamiento…</a:t>
             </a:r>
           </a:p>
         </p:txBody>
@@ -3466,7 +3469,7 @@
                   <a:srgbClr val="0B3D2E"/>
                 </a:solidFill>
               </a:rPr>
-              <a:t>🔗 Referencias</a:t>
+              <a:t>⚠️ Errores comunes</a:t>
             </a:r>
           </a:p>
         </p:txBody>
@@ -3504,6 +3507,274 @@
                   <a:srgbClr val="22282E"/>
                 </a:solidFill>
               </a:rPr>
+              <a:t>•  "No hay malware" en disco — Es fileless; analiza memoria y registro</a:t>
+            </a:r>
+          </a:p>
+          <a:p>
+            <a:pPr>
+              <a:spcAft>
+                <a:spcPts val="600"/>
+              </a:spcAft>
+            </a:pPr>
+            <a:r>
+              <a:rPr sz="1500">
+                <a:solidFill>
+                  <a:srgbClr val="22282E"/>
+                </a:solidFill>
+              </a:rPr>
+              <a:t>•  Sin telemetría útil — Sysmon/logging no configurados; habilítalos antes de detonar</a:t>
+            </a:r>
+          </a:p>
+          <a:p>
+            <a:pPr>
+              <a:spcAft>
+                <a:spcPts val="600"/>
+              </a:spcAft>
+            </a:pPr>
+            <a:r>
+              <a:rPr sz="1500">
+                <a:solidFill>
+                  <a:srgbClr val="22282E"/>
+                </a:solidFill>
+              </a:rPr>
+              <a:t>•  LOLBin parece legítimo — Revisa argumentos y proceso padre, no solo el binario</a:t>
+            </a:r>
+          </a:p>
+          <a:p>
+            <a:pPr>
+              <a:spcAft>
+                <a:spcPts val="600"/>
+              </a:spcAft>
+            </a:pPr>
+            <a:r>
+              <a:rPr sz="1500">
+                <a:solidFill>
+                  <a:srgbClr val="22282E"/>
+                </a:solidFill>
+              </a:rPr>
+              <a:t>•  Persistencia no aparece — Busca WMI y registro, no solo tareas/servicios con archivo</a:t>
+            </a:r>
+          </a:p>
+          <a:p>
+            <a:pPr>
+              <a:spcAft>
+                <a:spcPts val="600"/>
+              </a:spcAft>
+            </a:pPr>
+            <a:r>
+              <a:rPr sz="1500">
+                <a:solidFill>
+                  <a:srgbClr val="22282E"/>
+                </a:solidFill>
+              </a:rPr>
+              <a:t>•  Payload perdido al reiniciar — Fileless no persiste el binario; captura RAM en caliente</a:t>
+            </a:r>
+          </a:p>
+        </p:txBody>
+      </p:sp>
+    </p:spTree>
+  </p:cSld>
+  <p:clrMapOvr>
+    <a:masterClrMapping/>
+  </p:clrMapOvr>
+</p:sld>
+</file>
+
+<file path=ppt/slides/slide13.xml><?xml version="1.0" encoding="utf-8"?>
+<p:sld xmlns:a="http://schemas.openxmlformats.org/drawingml/2006/main" xmlns:p="http://schemas.openxmlformats.org/presentationml/2006/main" xmlns:r="http://schemas.openxmlformats.org/officeDocument/2006/relationships">
+  <p:cSld>
+    <p:spTree>
+      <p:nvGrpSpPr>
+        <p:cNvPr id="1" name=""/>
+        <p:cNvGrpSpPr/>
+        <p:nvPr/>
+      </p:nvGrpSpPr>
+      <p:grpSpPr/>
+      <p:sp>
+        <p:nvSpPr>
+          <p:cNvPr id="2" name="TextBox 1"/>
+          <p:cNvSpPr txBox="1"/>
+          <p:nvPr/>
+        </p:nvSpPr>
+        <p:spPr>
+          <a:xfrm>
+            <a:off x="457200" y="320040"/>
+            <a:ext cx="8229600" cy="822960"/>
+          </a:xfrm>
+          <a:prstGeom prst="rect">
+            <a:avLst/>
+          </a:prstGeom>
+          <a:noFill/>
+        </p:spPr>
+        <p:txBody>
+          <a:bodyPr wrap="square">
+            <a:spAutoFit/>
+          </a:bodyPr>
+          <a:lstStyle/>
+          <a:p>
+            <a:r>
+              <a:rPr sz="2600" b="1">
+                <a:solidFill>
+                  <a:srgbClr val="0B3D2E"/>
+                </a:solidFill>
+              </a:rPr>
+              <a:t>❓ Preguntas frecuentes</a:t>
+            </a:r>
+          </a:p>
+        </p:txBody>
+      </p:sp>
+      <p:sp>
+        <p:nvSpPr>
+          <p:cNvPr id="3" name="TextBox 2"/>
+          <p:cNvSpPr txBox="1"/>
+          <p:nvPr/>
+        </p:nvSpPr>
+        <p:spPr>
+          <a:xfrm>
+            <a:off x="457200" y="1280160"/>
+            <a:ext cx="8229600" cy="4937760"/>
+          </a:xfrm>
+          <a:prstGeom prst="rect">
+            <a:avLst/>
+          </a:prstGeom>
+          <a:noFill/>
+        </p:spPr>
+        <p:txBody>
+          <a:bodyPr wrap="square">
+            <a:spAutoFit/>
+          </a:bodyPr>
+          <a:lstStyle/>
+          <a:p>
+            <a:pPr>
+              <a:spcAft>
+                <a:spcPts val="600"/>
+              </a:spcAft>
+            </a:pPr>
+            <a:r>
+              <a:rPr sz="1500">
+                <a:solidFill>
+                  <a:srgbClr val="22282E"/>
+                </a:solidFill>
+              </a:rPr>
+              <a:t>•  ❓ ¿Fileless significa sin ningún rastro? No. Deja rastro en memoria, registro, WMI y telemetría; solo evita el archivo ejecutable clásico en disco.</a:t>
+            </a:r>
+          </a:p>
+          <a:p>
+            <a:pPr>
+              <a:spcAft>
+                <a:spcPts val="600"/>
+              </a:spcAft>
+            </a:pPr>
+            <a:r>
+              <a:rPr sz="1500">
+                <a:solidFill>
+                  <a:srgbClr val="22282E"/>
+                </a:solidFill>
+              </a:rPr>
+              <a:t>•  ❓ ¿Cómo detecto abuso de LOLBins? Por comportamiento: relaciones proceso-padre inusuales, argumentos anómalos y accesos de red desde binarios que normalmente no los hacen.</a:t>
+            </a:r>
+          </a:p>
+          <a:p>
+            <a:pPr>
+              <a:spcAft>
+                <a:spcPts val="600"/>
+              </a:spcAft>
+            </a:pPr>
+            <a:r>
+              <a:rPr sz="1500">
+                <a:solidFill>
+                  <a:srgbClr val="22282E"/>
+                </a:solidFill>
+              </a:rPr>
+              <a:t>•  ❓ ¿La memoria es imprescindible aquí? Sí. Para fileless, el volcado de RAM suele ser la única fuente que contiene el payload real.</a:t>
+            </a:r>
+          </a:p>
+        </p:txBody>
+      </p:sp>
+    </p:spTree>
+  </p:cSld>
+  <p:clrMapOvr>
+    <a:masterClrMapping/>
+  </p:clrMapOvr>
+</p:sld>
+</file>
+
+<file path=ppt/slides/slide14.xml><?xml version="1.0" encoding="utf-8"?>
+<p:sld xmlns:a="http://schemas.openxmlformats.org/drawingml/2006/main" xmlns:p="http://schemas.openxmlformats.org/presentationml/2006/main" xmlns:r="http://schemas.openxmlformats.org/officeDocument/2006/relationships">
+  <p:cSld>
+    <p:spTree>
+      <p:nvGrpSpPr>
+        <p:cNvPr id="1" name=""/>
+        <p:cNvGrpSpPr/>
+        <p:nvPr/>
+      </p:nvGrpSpPr>
+      <p:grpSpPr/>
+      <p:sp>
+        <p:nvSpPr>
+          <p:cNvPr id="2" name="TextBox 1"/>
+          <p:cNvSpPr txBox="1"/>
+          <p:nvPr/>
+        </p:nvSpPr>
+        <p:spPr>
+          <a:xfrm>
+            <a:off x="457200" y="320040"/>
+            <a:ext cx="8229600" cy="822960"/>
+          </a:xfrm>
+          <a:prstGeom prst="rect">
+            <a:avLst/>
+          </a:prstGeom>
+          <a:noFill/>
+        </p:spPr>
+        <p:txBody>
+          <a:bodyPr wrap="square">
+            <a:spAutoFit/>
+          </a:bodyPr>
+          <a:lstStyle/>
+          <a:p>
+            <a:r>
+              <a:rPr sz="2600" b="1">
+                <a:solidFill>
+                  <a:srgbClr val="0B3D2E"/>
+                </a:solidFill>
+              </a:rPr>
+              <a:t>🔗 Referencias</a:t>
+            </a:r>
+          </a:p>
+        </p:txBody>
+      </p:sp>
+      <p:sp>
+        <p:nvSpPr>
+          <p:cNvPr id="3" name="TextBox 2"/>
+          <p:cNvSpPr txBox="1"/>
+          <p:nvPr/>
+        </p:nvSpPr>
+        <p:spPr>
+          <a:xfrm>
+            <a:off x="457200" y="1280160"/>
+            <a:ext cx="8229600" cy="4937760"/>
+          </a:xfrm>
+          <a:prstGeom prst="rect">
+            <a:avLst/>
+          </a:prstGeom>
+          <a:noFill/>
+        </p:spPr>
+        <p:txBody>
+          <a:bodyPr wrap="square">
+            <a:spAutoFit/>
+          </a:bodyPr>
+          <a:lstStyle/>
+          <a:p>
+            <a:pPr>
+              <a:spcAft>
+                <a:spcPts val="600"/>
+              </a:spcAft>
+            </a:pPr>
+            <a:r>
+              <a:rPr sz="1500">
+                <a:solidFill>
+                  <a:srgbClr val="22282E"/>
+                </a:solidFill>
+              </a:rPr>
               <a:t>•  Ligh et al., The Art of Memory Forensics.</a:t>
             </a:r>
           </a:p>
@@ -3554,6 +3825,81 @@
           </a:p>
         </p:txBody>
       </p:sp>
+    </p:spTree>
+  </p:cSld>
+  <p:clrMapOvr>
+    <a:masterClrMapping/>
+  </p:clrMapOvr>
+</p:sld>
+</file>
+
+<file path=ppt/slides/slide15.xml><?xml version="1.0" encoding="utf-8"?>
+<p:sld xmlns:a="http://schemas.openxmlformats.org/drawingml/2006/main" xmlns:p="http://schemas.openxmlformats.org/presentationml/2006/main" xmlns:r="http://schemas.openxmlformats.org/officeDocument/2006/relationships">
+  <p:cSld>
+    <p:spTree>
+      <p:nvGrpSpPr>
+        <p:cNvPr id="1" name=""/>
+        <p:cNvGrpSpPr/>
+        <p:nvPr/>
+      </p:nvGrpSpPr>
+      <p:grpSpPr/>
+      <p:sp>
+        <p:nvSpPr>
+          <p:cNvPr id="2" name="TextBox 1"/>
+          <p:cNvSpPr txBox="1"/>
+          <p:nvPr/>
+        </p:nvSpPr>
+        <p:spPr>
+          <a:xfrm>
+            <a:off x="457200" y="274320"/>
+            <a:ext cx="8229600" cy="640080"/>
+          </a:xfrm>
+          <a:prstGeom prst="rect">
+            <a:avLst/>
+          </a:prstGeom>
+          <a:noFill/>
+        </p:spPr>
+        <p:txBody>
+          <a:bodyPr wrap="square">
+            <a:spAutoFit/>
+          </a:bodyPr>
+          <a:lstStyle/>
+          <a:p>
+            <a:r>
+              <a:rPr sz="2200" b="1">
+                <a:solidFill>
+                  <a:srgbClr val="0B3D2E"/>
+                </a:solidFill>
+              </a:rPr>
+              <a:t>Diagrama de la clase</a:t>
+            </a:r>
+          </a:p>
+        </p:txBody>
+      </p:sp>
+      <p:pic>
+        <p:nvPicPr>
+          <p:cNvPr id="3" name="Picture 2" descr="daa2251b9dc7433a.png"/>
+          <p:cNvPicPr>
+            <a:picLocks noChangeAspect="1"/>
+          </p:cNvPicPr>
+          <p:nvPr/>
+        </p:nvPicPr>
+        <p:blipFill>
+          <a:blip r:embed="rId2"/>
+          <a:stretch>
+            <a:fillRect/>
+          </a:stretch>
+        </p:blipFill>
+        <p:spPr>
+          <a:xfrm>
+            <a:off x="1098898" y="1097280"/>
+            <a:ext cx="6946203" cy="5303520"/>
+          </a:xfrm>
+          <a:prstGeom prst="rect">
+            <a:avLst/>
+          </a:prstGeom>
+        </p:spPr>
+      </p:pic>
     </p:spTree>
   </p:cSld>
   <p:clrMapOvr>
@@ -3638,7 +3984,7 @@
                   <a:srgbClr val="22282E"/>
                 </a:solidFill>
               </a:rPr>
-              <a:t>•  Analizar amenazas que apenas tocan el disco: malware fileless que vive en memoria o en el registro, y ataques living-off-the-land (LOLBins) que abusan de binarios legítimos del sistema. El alumno aprenderá a detectar y reconstruir estas técnicas con forense de memoria y telemetría, donde el análisis de archivos tradicional se queda ciego.</a:t>
+              <a:t>•  Analizar amenazas que apenas tocan el disco: malware fileless que vive en memoria o en el registro, y ataques living-off-the-land (LOLBins) que abusan de binarios legítimos del sistema. El alumno…</a:t>
             </a:r>
           </a:p>
         </p:txBody>
@@ -4032,7 +4378,7 @@
                   <a:srgbClr val="0B3D2E"/>
                 </a:solidFill>
               </a:rPr>
-              <a:t>📖 Definiciones y características</a:t>
+              <a:t>🧠 Explicación en profundidad</a:t>
             </a:r>
           </a:p>
         </p:txBody>
@@ -4070,67 +4416,97 @@
                   <a:srgbClr val="22282E"/>
                 </a:solidFill>
               </a:rPr>
-              <a:t>•  Fileless malware: ejecuta principalmente en memoria, con poca o nula huella en disco. Característica clave: evasión de AV de archivos.</a:t>
-            </a:r>
-          </a:p>
-          <a:p>
-            <a:pPr>
-              <a:spcAft>
-                <a:spcPts val="600"/>
-              </a:spcAft>
-            </a:pPr>
-            <a:r>
-              <a:rPr sz="1500">
-                <a:solidFill>
-                  <a:srgbClr val="22282E"/>
-                </a:solidFill>
-              </a:rPr>
-              <a:t>•  LOLBin/LOLBAS: binario legítimo del SO abusado con fines maliciosos. Característica clave: confianza heredada.</a:t>
-            </a:r>
-          </a:p>
-          <a:p>
-            <a:pPr>
-              <a:spcAft>
-                <a:spcPts val="600"/>
-              </a:spcAft>
-            </a:pPr>
-            <a:r>
-              <a:rPr sz="1500">
-                <a:solidFill>
-                  <a:srgbClr val="22282E"/>
-                </a:solidFill>
-              </a:rPr>
-              <a:t>•  Persistencia WMI: suscripciones a eventos WMI para ejecutar código. Característica clave: sin archivo visible.</a:t>
-            </a:r>
-          </a:p>
-          <a:p>
-            <a:pPr>
-              <a:spcAft>
-                <a:spcPts val="600"/>
-              </a:spcAft>
-            </a:pPr>
-            <a:r>
-              <a:rPr sz="1500">
-                <a:solidFill>
-                  <a:srgbClr val="22282E"/>
-                </a:solidFill>
-              </a:rPr>
-              <a:t>•  Registro como almacenamiento: payloads guardados en claves del registro. Característica clave: oculto y persistente.</a:t>
-            </a:r>
-          </a:p>
-          <a:p>
-            <a:pPr>
-              <a:spcAft>
-                <a:spcPts val="600"/>
-              </a:spcAft>
-            </a:pPr>
-            <a:r>
-              <a:rPr sz="1500">
-                <a:solidFill>
-                  <a:srgbClr val="22282E"/>
-                </a:solidFill>
-              </a:rPr>
-              <a:t>•  In-memory injection: cargar y ejecutar payload en RAM. Característica clave: nada que escanear en disco.</a:t>
+              <a:t>•  El malware fileless (sin fichero) es el que no escribe un ejecutable malicioso en el disco, o lo</a:t>
+            </a:r>
+          </a:p>
+          <a:p>
+            <a:pPr>
+              <a:spcAft>
+                <a:spcPts val="600"/>
+              </a:spcAft>
+            </a:pPr>
+            <a:r>
+              <a:rPr sz="1500">
+                <a:solidFill>
+                  <a:srgbClr val="22282E"/>
+                </a:solidFill>
+              </a:rPr>
+              <a:t>•  hace de forma mínima y efímera, operando principalmente en memoria y abusando de herramientas</a:t>
+            </a:r>
+          </a:p>
+          <a:p>
+            <a:pPr>
+              <a:spcAft>
+                <a:spcPts val="600"/>
+              </a:spcAft>
+            </a:pPr>
+            <a:r>
+              <a:rPr sz="1500">
+                <a:solidFill>
+                  <a:srgbClr val="22282E"/>
+                </a:solidFill>
+              </a:rPr>
+              <a:t>•  legítimas del sistema. Su razón de ser es la evasión: las defensas tradicionales (antivirus, listas</a:t>
+            </a:r>
+          </a:p>
+          <a:p>
+            <a:pPr>
+              <a:spcAft>
+                <a:spcPts val="600"/>
+              </a:spcAft>
+            </a:pPr>
+            <a:r>
+              <a:rPr sz="1500">
+                <a:solidFill>
+                  <a:srgbClr val="22282E"/>
+                </a:solidFill>
+              </a:rPr>
+              <a:t>•  de hashes) se basan en escanear ficheros en disco, así que un malware que no deja fichero no tiene</a:t>
+            </a:r>
+          </a:p>
+          <a:p>
+            <a:pPr>
+              <a:spcAft>
+                <a:spcPts val="600"/>
+              </a:spcAft>
+            </a:pPr>
+            <a:r>
+              <a:rPr sz="1500">
+                <a:solidFill>
+                  <a:srgbClr val="22282E"/>
+                </a:solidFill>
+              </a:rPr>
+              <a:t>•  qué escanear —es invisible para toda una generación de defensas—. El fileless no es una familia concreta</a:t>
+            </a:r>
+          </a:p>
+          <a:p>
+            <a:pPr>
+              <a:spcAft>
+                <a:spcPts val="600"/>
+              </a:spcAft>
+            </a:pPr>
+            <a:r>
+              <a:rPr sz="1500">
+                <a:solidFill>
+                  <a:srgbClr val="22282E"/>
+                </a:solidFill>
+              </a:rPr>
+              <a:t>•  sino un enfoque que muchas amenazas modernas adoptan, y entenderlo es esencial porque ha cambiado el</a:t>
+            </a:r>
+          </a:p>
+          <a:p>
+            <a:pPr>
+              <a:spcAft>
+                <a:spcPts val="600"/>
+              </a:spcAft>
+            </a:pPr>
+            <a:r>
+              <a:rPr sz="1500">
+                <a:solidFill>
+                  <a:srgbClr val="22282E"/>
+                </a:solidFill>
+              </a:rPr>
+              <a:t>•  centro de gravedad de la defensa del disco a la memoria y el comportamiento.</a:t>
             </a:r>
           </a:p>
         </p:txBody>
@@ -4181,7 +4557,7 @@
                   <a:srgbClr val="0B3D2E"/>
                 </a:solidFill>
               </a:rPr>
-              <a:t>🧰 Herramientas y preparación</a:t>
+              <a:t>📖 Definiciones y características</a:t>
             </a:r>
           </a:p>
         </p:txBody>
@@ -4219,52 +4595,67 @@
                   <a:srgbClr val="22282E"/>
                 </a:solidFill>
               </a:rPr>
-              <a:t>•  Volatility 3 (malfind, windows.registry, windows.svcscan, windows.wmi).</a:t>
-            </a:r>
-          </a:p>
-          <a:p>
-            <a:pPr>
-              <a:spcAft>
-                <a:spcPts val="600"/>
-              </a:spcAft>
-            </a:pPr>
-            <a:r>
-              <a:rPr sz="1500">
-                <a:solidFill>
-                  <a:srgbClr val="22282E"/>
-                </a:solidFill>
-              </a:rPr>
-              <a:t>•  Sysmon (Event IDs 1, 3, 7, 8, 11, 19–21) y Event Viewer (PowerShell 4104).</a:t>
-            </a:r>
-          </a:p>
-          <a:p>
-            <a:pPr>
-              <a:spcAft>
-                <a:spcPts val="600"/>
-              </a:spcAft>
-            </a:pPr>
-            <a:r>
-              <a:rPr sz="1500">
-                <a:solidFill>
-                  <a:srgbClr val="22282E"/>
-                </a:solidFill>
-              </a:rPr>
-              <a:t>•  Referencia LOLBAS (lolbas-project.github.io).</a:t>
-            </a:r>
-          </a:p>
-          <a:p>
-            <a:pPr>
-              <a:spcAft>
-                <a:spcPts val="600"/>
-              </a:spcAft>
-            </a:pPr>
-            <a:r>
-              <a:rPr sz="1500">
-                <a:solidFill>
-                  <a:srgbClr val="22282E"/>
-                </a:solidFill>
-              </a:rPr>
-              <a:t>•  Autoruns, winpmem para capturar RAM.</a:t>
+              <a:t>•  Fileless malware: ejecuta principalmente en memoria, con poca o nula huella en disco. Característica clave: evasión de AV de archivos.</a:t>
+            </a:r>
+          </a:p>
+          <a:p>
+            <a:pPr>
+              <a:spcAft>
+                <a:spcPts val="600"/>
+              </a:spcAft>
+            </a:pPr>
+            <a:r>
+              <a:rPr sz="1500">
+                <a:solidFill>
+                  <a:srgbClr val="22282E"/>
+                </a:solidFill>
+              </a:rPr>
+              <a:t>•  LOLBin/LOLBAS: binario legítimo del SO abusado con fines maliciosos. Característica clave: confianza heredada.</a:t>
+            </a:r>
+          </a:p>
+          <a:p>
+            <a:pPr>
+              <a:spcAft>
+                <a:spcPts val="600"/>
+              </a:spcAft>
+            </a:pPr>
+            <a:r>
+              <a:rPr sz="1500">
+                <a:solidFill>
+                  <a:srgbClr val="22282E"/>
+                </a:solidFill>
+              </a:rPr>
+              <a:t>•  Persistencia WMI: suscripciones a eventos WMI para ejecutar código. Característica clave: sin archivo visible.</a:t>
+            </a:r>
+          </a:p>
+          <a:p>
+            <a:pPr>
+              <a:spcAft>
+                <a:spcPts val="600"/>
+              </a:spcAft>
+            </a:pPr>
+            <a:r>
+              <a:rPr sz="1500">
+                <a:solidFill>
+                  <a:srgbClr val="22282E"/>
+                </a:solidFill>
+              </a:rPr>
+              <a:t>•  Registro como almacenamiento: payloads guardados en claves del registro. Característica clave: oculto y persistente.</a:t>
+            </a:r>
+          </a:p>
+          <a:p>
+            <a:pPr>
+              <a:spcAft>
+                <a:spcPts val="600"/>
+              </a:spcAft>
+            </a:pPr>
+            <a:r>
+              <a:rPr sz="1500">
+                <a:solidFill>
+                  <a:srgbClr val="22282E"/>
+                </a:solidFill>
+              </a:rPr>
+              <a:t>•  In-memory injection: cargar y ejecutar payload en RAM. Característica clave: nada que escanear en disco.</a:t>
             </a:r>
           </a:p>
         </p:txBody>
@@ -4315,7 +4706,7 @@
                   <a:srgbClr val="0B3D2E"/>
                 </a:solidFill>
               </a:rPr>
-              <a:t>🧪 Laboratorio guiado</a:t>
+              <a:t>📔 Glosario</a:t>
             </a:r>
           </a:p>
         </p:txBody>
@@ -4353,97 +4744,97 @@
                   <a:srgbClr val="22282E"/>
                 </a:solidFill>
               </a:rPr>
-              <a:t>•  Restaura base-clean, habilita Sysmon (config tipo SwiftOnSecurity) y ScriptBlock Logging.</a:t>
-            </a:r>
-          </a:p>
-          <a:p>
-            <a:pPr>
-              <a:spcAft>
-                <a:spcPts val="600"/>
-              </a:spcAft>
-            </a:pPr>
-            <a:r>
-              <a:rPr sz="1500">
-                <a:solidFill>
-                  <a:srgbClr val="22282E"/>
-                </a:solidFill>
-              </a:rPr>
-              <a:t>•  Detona un caso fileless (o reproduce una cadena LOLBin controlada). Captura RAM con winpmem al final.</a:t>
-            </a:r>
-          </a:p>
-          <a:p>
-            <a:pPr>
-              <a:spcAft>
-                <a:spcPts val="600"/>
-              </a:spcAft>
-            </a:pPr>
-            <a:r>
-              <a:rPr sz="1500">
-                <a:solidFill>
-                  <a:srgbClr val="22282E"/>
-                </a:solidFill>
-              </a:rPr>
-              <a:t>•  Con Volatility, windows.malfind para regiones RWX inyectadas: identifica el payload en memoria y vuélcalo para analizarlo.</a:t>
-            </a:r>
-          </a:p>
-          <a:p>
-            <a:pPr>
-              <a:spcAft>
-                <a:spcPts val="600"/>
-              </a:spcAft>
-            </a:pPr>
-            <a:r>
-              <a:rPr sz="1500">
-                <a:solidFill>
-                  <a:srgbClr val="22282E"/>
-                </a:solidFill>
-              </a:rPr>
-              <a:t>•  Busca persistencia sin archivo: windows.registry.printkey en claves Run/servicios con payloads codificados, y suscripciones WMI (EventFilter/CommandLineEventConsumer).</a:t>
-            </a:r>
-          </a:p>
-          <a:p>
-            <a:pPr>
-              <a:spcAft>
-                <a:spcPts val="600"/>
-              </a:spcAft>
-            </a:pPr>
-            <a:r>
-              <a:rPr sz="1500">
-                <a:solidFill>
-                  <a:srgbClr val="22282E"/>
-                </a:solidFill>
-              </a:rPr>
-              <a:t>•  Revisa la telemetría: en Sysmon, procesos hijos de Office/explorer que lanzan powershell, mshta, rundll32, regsvr32 con argumentos sospechosos (LOLBins). Anota los Event IDs.</a:t>
-            </a:r>
-          </a:p>
-          <a:p>
-            <a:pPr>
-              <a:spcAft>
-                <a:spcPts val="600"/>
-              </a:spcAft>
-            </a:pPr>
-            <a:r>
-              <a:rPr sz="1500">
-                <a:solidFill>
-                  <a:srgbClr val="22282E"/>
-                </a:solidFill>
-              </a:rPr>
-              <a:t>•  Reconstruye la cadena de ejecución uniendo memoria + Sysmon + ScriptBlock (Event 4104).</a:t>
-            </a:r>
-          </a:p>
-          <a:p>
-            <a:pPr>
-              <a:spcAft>
-                <a:spcPts val="600"/>
-              </a:spcAft>
-            </a:pPr>
-            <a:r>
-              <a:rPr sz="1500">
-                <a:solidFill>
-                  <a:srgbClr val="22282E"/>
-                </a:solidFill>
-              </a:rPr>
-              <a:t>•  Propón detecciones por comportamiento (p. ej. rundll32 sin DLL, regsvr32 con URL, WMI consumer nuevo) y mapea a ATT&amp;CK (T1218, T1546.003, T1055).</a:t>
+              <a:t>•  Término — Definición concisa</a:t>
+            </a:r>
+          </a:p>
+          <a:p>
+            <a:pPr>
+              <a:spcAft>
+                <a:spcPts val="600"/>
+              </a:spcAft>
+            </a:pPr>
+            <a:r>
+              <a:rPr sz="1500">
+                <a:solidFill>
+                  <a:srgbClr val="22282E"/>
+                </a:solidFill>
+              </a:rPr>
+              <a:t>•  Fileless — Malware que no escribe un ejecutable en disco</a:t>
+            </a:r>
+          </a:p>
+          <a:p>
+            <a:pPr>
+              <a:spcAft>
+                <a:spcPts val="600"/>
+              </a:spcAft>
+            </a:pPr>
+            <a:r>
+              <a:rPr sz="1500">
+                <a:solidFill>
+                  <a:srgbClr val="22282E"/>
+                </a:solidFill>
+              </a:rPr>
+              <a:t>•  Evasión por diseño — No hay fichero que escanear</a:t>
+            </a:r>
+          </a:p>
+          <a:p>
+            <a:pPr>
+              <a:spcAft>
+                <a:spcPts val="600"/>
+              </a:spcAft>
+            </a:pPr>
+            <a:r>
+              <a:rPr sz="1500">
+                <a:solidFill>
+                  <a:srgbClr val="22282E"/>
+                </a:solidFill>
+              </a:rPr>
+              <a:t>•  Persistencia sin fichero — Código en el registro o en suscripciones WMI</a:t>
+            </a:r>
+          </a:p>
+          <a:p>
+            <a:pPr>
+              <a:spcAft>
+                <a:spcPts val="600"/>
+              </a:spcAft>
+            </a:pPr>
+            <a:r>
+              <a:rPr sz="1500">
+                <a:solidFill>
+                  <a:srgbClr val="22282E"/>
+                </a:solidFill>
+              </a:rPr>
+              <a:t>•  Ejecución en memoria — Inyección o carga reflectiva sin tocar disco</a:t>
+            </a:r>
+          </a:p>
+          <a:p>
+            <a:pPr>
+              <a:spcAft>
+                <a:spcPts val="600"/>
+              </a:spcAft>
+            </a:pPr>
+            <a:r>
+              <a:rPr sz="1500">
+                <a:solidFill>
+                  <a:srgbClr val="22282E"/>
+                </a:solidFill>
+              </a:rPr>
+              <a:t>•  Living off the land (LotL) — Abusar de herramientas legítimas del sistema</a:t>
+            </a:r>
+          </a:p>
+          <a:p>
+            <a:pPr>
+              <a:spcAft>
+                <a:spcPts val="600"/>
+              </a:spcAft>
+            </a:pPr>
+            <a:r>
+              <a:rPr sz="1500">
+                <a:solidFill>
+                  <a:srgbClr val="22282E"/>
+                </a:solidFill>
+              </a:rPr>
+              <a:t>•  LOLBin — Binario legítimo del sistema abusado</a:t>
             </a:r>
           </a:p>
         </p:txBody>
@@ -4494,7 +4885,7 @@
                   <a:srgbClr val="0B3D2E"/>
                 </a:solidFill>
               </a:rPr>
-              <a:t>✍️ Ejercicios</a:t>
+              <a:t>🧰 Herramientas y preparación</a:t>
             </a:r>
           </a:p>
         </p:txBody>
@@ -4532,82 +4923,52 @@
                   <a:srgbClr val="22282E"/>
                 </a:solidFill>
               </a:rPr>
-              <a:t>•  Explica por qué el AV de archivos falla contra fileless.</a:t>
-            </a:r>
-          </a:p>
-          <a:p>
-            <a:pPr>
-              <a:spcAft>
-                <a:spcPts val="600"/>
-              </a:spcAft>
-            </a:pPr>
-            <a:r>
-              <a:rPr sz="1500">
-                <a:solidFill>
-                  <a:srgbClr val="22282E"/>
-                </a:solidFill>
-              </a:rPr>
-              <a:t>•  Enumera 6 LOLBins y su abuso típico (con Event Sysmon esperado).</a:t>
-            </a:r>
-          </a:p>
-          <a:p>
-            <a:pPr>
-              <a:spcAft>
-                <a:spcPts val="600"/>
-              </a:spcAft>
-            </a:pPr>
-            <a:r>
-              <a:rPr sz="1500">
-                <a:solidFill>
-                  <a:srgbClr val="22282E"/>
-                </a:solidFill>
-              </a:rPr>
-              <a:t>•  Detecta un payload en memoria con malfind y vuélcalo.</a:t>
-            </a:r>
-          </a:p>
-          <a:p>
-            <a:pPr>
-              <a:spcAft>
-                <a:spcPts val="600"/>
-              </a:spcAft>
-            </a:pPr>
-            <a:r>
-              <a:rPr sz="1500">
-                <a:solidFill>
-                  <a:srgbClr val="22282E"/>
-                </a:solidFill>
-              </a:rPr>
-              <a:t>•  Identifica una persistencia WMI y descríbela.</a:t>
-            </a:r>
-          </a:p>
-          <a:p>
-            <a:pPr>
-              <a:spcAft>
-                <a:spcPts val="600"/>
-              </a:spcAft>
-            </a:pPr>
-            <a:r>
-              <a:rPr sz="1500">
-                <a:solidFill>
-                  <a:srgbClr val="22282E"/>
-                </a:solidFill>
-              </a:rPr>
-              <a:t>•  Escribe una regla de detección para regsvr32 con URL remota.</a:t>
-            </a:r>
-          </a:p>
-          <a:p>
-            <a:pPr>
-              <a:spcAft>
-                <a:spcPts val="600"/>
-              </a:spcAft>
-            </a:pPr>
-            <a:r>
-              <a:rPr sz="1500">
-                <a:solidFill>
-                  <a:srgbClr val="22282E"/>
-                </a:solidFill>
-              </a:rPr>
-              <a:t>•  Reconstruye una cadena LOLBin desde logs de Sysmon.</a:t>
+              <a:t>•  Volatility 3 (malfind, windows.registry, windows.svcscan, windows.wmi).</a:t>
+            </a:r>
+          </a:p>
+          <a:p>
+            <a:pPr>
+              <a:spcAft>
+                <a:spcPts val="600"/>
+              </a:spcAft>
+            </a:pPr>
+            <a:r>
+              <a:rPr sz="1500">
+                <a:solidFill>
+                  <a:srgbClr val="22282E"/>
+                </a:solidFill>
+              </a:rPr>
+              <a:t>•  Sysmon (Event IDs 1, 3, 7, 8, 11, 19–21) y Event Viewer (PowerShell 4104).</a:t>
+            </a:r>
+          </a:p>
+          <a:p>
+            <a:pPr>
+              <a:spcAft>
+                <a:spcPts val="600"/>
+              </a:spcAft>
+            </a:pPr>
+            <a:r>
+              <a:rPr sz="1500">
+                <a:solidFill>
+                  <a:srgbClr val="22282E"/>
+                </a:solidFill>
+              </a:rPr>
+              <a:t>•  Referencia LOLBAS (lolbas-project.github.io).</a:t>
+            </a:r>
+          </a:p>
+          <a:p>
+            <a:pPr>
+              <a:spcAft>
+                <a:spcPts val="600"/>
+              </a:spcAft>
+            </a:pPr>
+            <a:r>
+              <a:rPr sz="1500">
+                <a:solidFill>
+                  <a:srgbClr val="22282E"/>
+                </a:solidFill>
+              </a:rPr>
+              <a:t>•  Autoruns, winpmem para capturar RAM.</a:t>
             </a:r>
           </a:p>
         </p:txBody>
@@ -4658,7 +5019,7 @@
                   <a:srgbClr val="0B3D2E"/>
                 </a:solidFill>
               </a:rPr>
-              <a:t>📝 Reto verificable</a:t>
+              <a:t>🧪 Laboratorio guiado</a:t>
             </a:r>
           </a:p>
         </p:txBody>
@@ -4696,22 +5057,97 @@
                   <a:srgbClr val="22282E"/>
                 </a:solidFill>
               </a:rPr>
-              <a:t>•  Analiza una cadena fileless/LOLBin y entrega su reconstrucción con: payload en memoria volcado, persistencia sin archivo identificada, LOLBins abusados y detecciones por comportamiento mapeadas a ATT&amp;CK.</a:t>
-            </a:r>
-          </a:p>
-          <a:p>
-            <a:pPr>
-              <a:spcAft>
-                <a:spcPts val="600"/>
-              </a:spcAft>
-            </a:pPr>
-            <a:r>
-              <a:rPr sz="1500">
-                <a:solidFill>
-                  <a:srgbClr val="22282E"/>
-                </a:solidFill>
-              </a:rPr>
-              <a:t>•  Criterio de aceptación: presentas evidencia de memoria (malfind/registro/WMI) y de telemetría (Sysmon/4104) que juntas explican la cadena completa, más al menos dos detecciones por comportamiento implementables.</a:t>
+              <a:t>•  Restaura base-clean, habilita Sysmon (config tipo SwiftOnSecurity) y ScriptBlock Logging.</a:t>
+            </a:r>
+          </a:p>
+          <a:p>
+            <a:pPr>
+              <a:spcAft>
+                <a:spcPts val="600"/>
+              </a:spcAft>
+            </a:pPr>
+            <a:r>
+              <a:rPr sz="1500">
+                <a:solidFill>
+                  <a:srgbClr val="22282E"/>
+                </a:solidFill>
+              </a:rPr>
+              <a:t>•  Detona un caso fileless (o reproduce una cadena LOLBin controlada). Captura RAM con winpmem al final.</a:t>
+            </a:r>
+          </a:p>
+          <a:p>
+            <a:pPr>
+              <a:spcAft>
+                <a:spcPts val="600"/>
+              </a:spcAft>
+            </a:pPr>
+            <a:r>
+              <a:rPr sz="1500">
+                <a:solidFill>
+                  <a:srgbClr val="22282E"/>
+                </a:solidFill>
+              </a:rPr>
+              <a:t>•  Con Volatility, windows.malfind para regiones RWX inyectadas: identifica el payload en memoria y vuélcalo para analizarlo.</a:t>
+            </a:r>
+          </a:p>
+          <a:p>
+            <a:pPr>
+              <a:spcAft>
+                <a:spcPts val="600"/>
+              </a:spcAft>
+            </a:pPr>
+            <a:r>
+              <a:rPr sz="1500">
+                <a:solidFill>
+                  <a:srgbClr val="22282E"/>
+                </a:solidFill>
+              </a:rPr>
+              <a:t>•  Busca persistencia sin archivo: windows.registry.printkey en claves Run/servicios con payloads codificados, y suscripciones WMI (EventFilter/CommandLineEventConsumer).</a:t>
+            </a:r>
+          </a:p>
+          <a:p>
+            <a:pPr>
+              <a:spcAft>
+                <a:spcPts val="600"/>
+              </a:spcAft>
+            </a:pPr>
+            <a:r>
+              <a:rPr sz="1500">
+                <a:solidFill>
+                  <a:srgbClr val="22282E"/>
+                </a:solidFill>
+              </a:rPr>
+              <a:t>•  Revisa la telemetría: en Sysmon, procesos hijos de Office/explorer que lanzan powershell, mshta, rundll32, regsvr32 con argumentos sospechosos (LOLBins). Anota los Event IDs.</a:t>
+            </a:r>
+          </a:p>
+          <a:p>
+            <a:pPr>
+              <a:spcAft>
+                <a:spcPts val="600"/>
+              </a:spcAft>
+            </a:pPr>
+            <a:r>
+              <a:rPr sz="1500">
+                <a:solidFill>
+                  <a:srgbClr val="22282E"/>
+                </a:solidFill>
+              </a:rPr>
+              <a:t>•  Reconstruye la cadena de ejecución uniendo memoria + Sysmon + ScriptBlock (Event 4104).</a:t>
+            </a:r>
+          </a:p>
+          <a:p>
+            <a:pPr>
+              <a:spcAft>
+                <a:spcPts val="600"/>
+              </a:spcAft>
+            </a:pPr>
+            <a:r>
+              <a:rPr sz="1500">
+                <a:solidFill>
+                  <a:srgbClr val="22282E"/>
+                </a:solidFill>
+              </a:rPr>
+              <a:t>•  Propón detecciones por comportamiento (p. ej. rundll32 sin DLL, regsvr32 con URL, WMI consumer nuevo) y mapea a ATT&amp;CK (T1218, T1546.003, T1055).</a:t>
             </a:r>
           </a:p>
         </p:txBody>
